--- a/Week6/week6 Tutorial Class.pptx
+++ b/Week6/week6 Tutorial Class.pptx
@@ -241,7 +241,7 @@
           <a:p>
             <a:fld id="{D9D2A4DD-E6C5-4446-8814-DDCEAB64F4E0}" type="datetimeFigureOut">
               <a:rPr lang="ko-KR" altLang="en-US" smtClean="0"/>
-              <a:t>2023-04-12</a:t>
+              <a:t>2025-04-07</a:t>
             </a:fld>
             <a:endParaRPr lang="ko-KR" altLang="en-US"/>
           </a:p>
@@ -406,7 +406,7 @@
           <a:p>
             <a:fld id="{BF4D36B7-6BC9-4358-A9C9-63F4AFA82B46}" type="datetimeFigureOut">
               <a:rPr lang="ko-KR" altLang="en-US" smtClean="0"/>
-              <a:t>2023-04-12</a:t>
+              <a:t>2025-04-07</a:t>
             </a:fld>
             <a:endParaRPr lang="ko-KR" altLang="en-US"/>
           </a:p>
@@ -2316,7 +2316,7 @@
           <a:p>
             <a:fld id="{178ADFAC-D890-497A-A497-2A400DD02E74}" type="datetimeFigureOut">
               <a:rPr lang="ko-KR" altLang="en-US" smtClean="0"/>
-              <a:t>2023-04-12</a:t>
+              <a:t>2025-04-07</a:t>
             </a:fld>
             <a:endParaRPr lang="ko-KR" altLang="en-US"/>
           </a:p>
@@ -2486,7 +2486,7 @@
           <a:p>
             <a:fld id="{178ADFAC-D890-497A-A497-2A400DD02E74}" type="datetimeFigureOut">
               <a:rPr lang="ko-KR" altLang="en-US" smtClean="0"/>
-              <a:t>2023-04-12</a:t>
+              <a:t>2025-04-07</a:t>
             </a:fld>
             <a:endParaRPr lang="ko-KR" altLang="en-US"/>
           </a:p>
@@ -2666,7 +2666,7 @@
           <a:p>
             <a:fld id="{178ADFAC-D890-497A-A497-2A400DD02E74}" type="datetimeFigureOut">
               <a:rPr lang="ko-KR" altLang="en-US" smtClean="0"/>
-              <a:t>2023-04-12</a:t>
+              <a:t>2025-04-07</a:t>
             </a:fld>
             <a:endParaRPr lang="ko-KR" altLang="en-US"/>
           </a:p>
@@ -2836,7 +2836,7 @@
           <a:p>
             <a:fld id="{178ADFAC-D890-497A-A497-2A400DD02E74}" type="datetimeFigureOut">
               <a:rPr lang="ko-KR" altLang="en-US" smtClean="0"/>
-              <a:t>2023-04-12</a:t>
+              <a:t>2025-04-07</a:t>
             </a:fld>
             <a:endParaRPr lang="ko-KR" altLang="en-US"/>
           </a:p>
@@ -3080,7 +3080,7 @@
           <a:p>
             <a:fld id="{178ADFAC-D890-497A-A497-2A400DD02E74}" type="datetimeFigureOut">
               <a:rPr lang="ko-KR" altLang="en-US" smtClean="0"/>
-              <a:t>2023-04-12</a:t>
+              <a:t>2025-04-07</a:t>
             </a:fld>
             <a:endParaRPr lang="ko-KR" altLang="en-US"/>
           </a:p>
@@ -3312,7 +3312,7 @@
           <a:p>
             <a:fld id="{178ADFAC-D890-497A-A497-2A400DD02E74}" type="datetimeFigureOut">
               <a:rPr lang="ko-KR" altLang="en-US" smtClean="0"/>
-              <a:t>2023-04-12</a:t>
+              <a:t>2025-04-07</a:t>
             </a:fld>
             <a:endParaRPr lang="ko-KR" altLang="en-US"/>
           </a:p>
@@ -3679,7 +3679,7 @@
           <a:p>
             <a:fld id="{178ADFAC-D890-497A-A497-2A400DD02E74}" type="datetimeFigureOut">
               <a:rPr lang="ko-KR" altLang="en-US" smtClean="0"/>
-              <a:t>2023-04-12</a:t>
+              <a:t>2025-04-07</a:t>
             </a:fld>
             <a:endParaRPr lang="ko-KR" altLang="en-US"/>
           </a:p>
@@ -3797,7 +3797,7 @@
           <a:p>
             <a:fld id="{178ADFAC-D890-497A-A497-2A400DD02E74}" type="datetimeFigureOut">
               <a:rPr lang="ko-KR" altLang="en-US" smtClean="0"/>
-              <a:t>2023-04-12</a:t>
+              <a:t>2025-04-07</a:t>
             </a:fld>
             <a:endParaRPr lang="ko-KR" altLang="en-US"/>
           </a:p>
@@ -3892,7 +3892,7 @@
           <a:p>
             <a:fld id="{178ADFAC-D890-497A-A497-2A400DD02E74}" type="datetimeFigureOut">
               <a:rPr lang="ko-KR" altLang="en-US" smtClean="0"/>
-              <a:t>2023-04-12</a:t>
+              <a:t>2025-04-07</a:t>
             </a:fld>
             <a:endParaRPr lang="ko-KR" altLang="en-US"/>
           </a:p>
@@ -4169,7 +4169,7 @@
           <a:p>
             <a:fld id="{178ADFAC-D890-497A-A497-2A400DD02E74}" type="datetimeFigureOut">
               <a:rPr lang="ko-KR" altLang="en-US" smtClean="0"/>
-              <a:t>2023-04-12</a:t>
+              <a:t>2025-04-07</a:t>
             </a:fld>
             <a:endParaRPr lang="ko-KR" altLang="en-US"/>
           </a:p>
@@ -4426,7 +4426,7 @@
           <a:p>
             <a:fld id="{178ADFAC-D890-497A-A497-2A400DD02E74}" type="datetimeFigureOut">
               <a:rPr lang="ko-KR" altLang="en-US" smtClean="0"/>
-              <a:t>2023-04-12</a:t>
+              <a:t>2025-04-07</a:t>
             </a:fld>
             <a:endParaRPr lang="ko-KR" altLang="en-US"/>
           </a:p>
@@ -4639,7 +4639,7 @@
           <a:p>
             <a:fld id="{178ADFAC-D890-497A-A497-2A400DD02E74}" type="datetimeFigureOut">
               <a:rPr lang="ko-KR" altLang="en-US" smtClean="0"/>
-              <a:t>2023-04-12</a:t>
+              <a:t>2025-04-07</a:t>
             </a:fld>
             <a:endParaRPr lang="ko-KR" altLang="en-US"/>
           </a:p>
@@ -5159,7 +5159,7 @@
         <p:spPr>
           <a:xfrm>
             <a:off x="1075166" y="3978237"/>
-            <a:ext cx="6941127" cy="1384995"/>
+            <a:ext cx="6941127" cy="1314462"/>
           </a:xfrm>
           <a:prstGeom prst="rect">
             <a:avLst/>
@@ -5205,11 +5205,18 @@
               </a:lnSpc>
             </a:pPr>
             <a:r>
+              <a:rPr lang="en-US" altLang="ko-KR" sz="2400" b="1">
+                <a:latin typeface="Arial Narrow" panose="020B0606020202030204" pitchFamily="34" charset="0"/>
+                <a:cs typeface="Times New Roman" panose="02020603050405020304" pitchFamily="18" charset="0"/>
+              </a:rPr>
+              <a:t>Associate </a:t>
+            </a:r>
+            <a:r>
               <a:rPr lang="en-US" altLang="ko-KR" sz="2400" b="1" dirty="0">
                 <a:latin typeface="Arial Narrow" panose="020B0606020202030204" pitchFamily="34" charset="0"/>
                 <a:cs typeface="Times New Roman" panose="02020603050405020304" pitchFamily="18" charset="0"/>
               </a:rPr>
-              <a:t>Assistant professor </a:t>
+              <a:t>professor </a:t>
             </a:r>
           </a:p>
         </p:txBody>
@@ -10135,98 +10142,119 @@
           </a:p>
         </p:txBody>
       </p:sp>
-      <p:pic>
-        <p:nvPicPr>
-          <p:cNvPr id="9" name="그림 8"/>
-          <p:cNvPicPr>
-            <a:picLocks noChangeAspect="1"/>
-          </p:cNvPicPr>
+      <p:grpSp>
+        <p:nvGrpSpPr>
+          <p:cNvPr id="2" name="그룹 1">
+            <a:extLst>
+              <a:ext uri="{FF2B5EF4-FFF2-40B4-BE49-F238E27FC236}">
+                <a16:creationId xmlns:a16="http://schemas.microsoft.com/office/drawing/2014/main" id="{4D85609A-6FDD-74E7-5277-5905A3E2F03D}"/>
+              </a:ext>
+            </a:extLst>
+          </p:cNvPr>
+          <p:cNvGrpSpPr/>
           <p:nvPr/>
-        </p:nvPicPr>
-        <p:blipFill>
-          <a:blip r:embed="rId3"/>
-          <a:stretch>
-            <a:fillRect/>
-          </a:stretch>
-        </p:blipFill>
-        <p:spPr>
-          <a:xfrm>
-            <a:off x="2153738" y="4475617"/>
-            <a:ext cx="3695700" cy="2152650"/>
-          </a:xfrm>
-          <a:prstGeom prst="rect">
-            <a:avLst/>
-          </a:prstGeom>
-        </p:spPr>
-      </p:pic>
-      <p:sp>
-        <p:nvSpPr>
-          <p:cNvPr id="10" name="직사각형 9"/>
-          <p:cNvSpPr/>
-          <p:nvPr/>
-        </p:nvSpPr>
-        <p:spPr>
-          <a:xfrm>
-            <a:off x="2580484" y="4502243"/>
-            <a:ext cx="657552" cy="369332"/>
-          </a:xfrm>
-          <a:prstGeom prst="rect">
-            <a:avLst/>
-          </a:prstGeom>
-        </p:spPr>
-        <p:txBody>
-          <a:bodyPr wrap="none">
-            <a:spAutoFit/>
-          </a:bodyPr>
-          <a:lstStyle/>
-          <a:p>
-            <a:r>
-              <a:rPr lang="en-US" altLang="ko-KR" dirty="0">
-                <a:solidFill>
-                  <a:srgbClr val="222222"/>
-                </a:solidFill>
-                <a:latin typeface="Arial Narrow" panose="020B0606020202030204" pitchFamily="34" charset="0"/>
-              </a:rPr>
-              <a:t>Class</a:t>
-            </a:r>
-            <a:endParaRPr lang="ko-KR" altLang="en-US" dirty="0"/>
-          </a:p>
-        </p:txBody>
-      </p:sp>
-      <p:sp>
-        <p:nvSpPr>
-          <p:cNvPr id="11" name="직사각형 10"/>
-          <p:cNvSpPr/>
-          <p:nvPr/>
-        </p:nvSpPr>
-        <p:spPr>
-          <a:xfrm>
-            <a:off x="5520662" y="4619811"/>
-            <a:ext cx="2074607" cy="369332"/>
-          </a:xfrm>
-          <a:prstGeom prst="rect">
-            <a:avLst/>
-          </a:prstGeom>
-        </p:spPr>
-        <p:txBody>
-          <a:bodyPr wrap="none">
-            <a:spAutoFit/>
-          </a:bodyPr>
-          <a:lstStyle/>
-          <a:p>
-            <a:r>
-              <a:rPr lang="en-US" altLang="ko-KR" dirty="0">
-                <a:solidFill>
-                  <a:srgbClr val="222222"/>
-                </a:solidFill>
-                <a:latin typeface="Arial Narrow" panose="020B0606020202030204" pitchFamily="34" charset="0"/>
-              </a:rPr>
-              <a:t>Instance, object, entity</a:t>
-            </a:r>
-            <a:endParaRPr lang="ko-KR" altLang="en-US" dirty="0"/>
-          </a:p>
-        </p:txBody>
-      </p:sp>
+        </p:nvGrpSpPr>
+        <p:grpSpPr>
+          <a:xfrm>
+            <a:off x="2153738" y="4467997"/>
+            <a:ext cx="3799387" cy="2160270"/>
+            <a:chOff x="2153738" y="4467997"/>
+            <a:chExt cx="3799387" cy="2160270"/>
+          </a:xfrm>
+        </p:grpSpPr>
+        <p:pic>
+          <p:nvPicPr>
+            <p:cNvPr id="9" name="그림 8"/>
+            <p:cNvPicPr>
+              <a:picLocks noChangeAspect="1"/>
+            </p:cNvPicPr>
+            <p:nvPr/>
+          </p:nvPicPr>
+          <p:blipFill>
+            <a:blip r:embed="rId3"/>
+            <a:stretch>
+              <a:fillRect/>
+            </a:stretch>
+          </p:blipFill>
+          <p:spPr>
+            <a:xfrm>
+              <a:off x="2153738" y="4475617"/>
+              <a:ext cx="3695700" cy="2152650"/>
+            </a:xfrm>
+            <a:prstGeom prst="rect">
+              <a:avLst/>
+            </a:prstGeom>
+          </p:spPr>
+        </p:pic>
+        <p:sp>
+          <p:nvSpPr>
+            <p:cNvPr id="10" name="직사각형 9"/>
+            <p:cNvSpPr/>
+            <p:nvPr/>
+          </p:nvSpPr>
+          <p:spPr>
+            <a:xfrm>
+              <a:off x="2580484" y="4502243"/>
+              <a:ext cx="657552" cy="369332"/>
+            </a:xfrm>
+            <a:prstGeom prst="rect">
+              <a:avLst/>
+            </a:prstGeom>
+          </p:spPr>
+          <p:txBody>
+            <a:bodyPr wrap="none">
+              <a:spAutoFit/>
+            </a:bodyPr>
+            <a:lstStyle/>
+            <a:p>
+              <a:r>
+                <a:rPr lang="en-US" altLang="ko-KR" dirty="0">
+                  <a:solidFill>
+                    <a:srgbClr val="222222"/>
+                  </a:solidFill>
+                  <a:latin typeface="Arial Narrow" panose="020B0606020202030204" pitchFamily="34" charset="0"/>
+                </a:rPr>
+                <a:t>Class</a:t>
+              </a:r>
+              <a:endParaRPr lang="ko-KR" altLang="en-US" dirty="0"/>
+            </a:p>
+          </p:txBody>
+        </p:sp>
+        <p:sp>
+          <p:nvSpPr>
+            <p:cNvPr id="11" name="직사각형 10"/>
+            <p:cNvSpPr/>
+            <p:nvPr/>
+          </p:nvSpPr>
+          <p:spPr>
+            <a:xfrm rot="5400000">
+              <a:off x="4731155" y="5320635"/>
+              <a:ext cx="2074607" cy="369332"/>
+            </a:xfrm>
+            <a:prstGeom prst="rect">
+              <a:avLst/>
+            </a:prstGeom>
+          </p:spPr>
+          <p:txBody>
+            <a:bodyPr wrap="none">
+              <a:spAutoFit/>
+            </a:bodyPr>
+            <a:lstStyle/>
+            <a:p>
+              <a:r>
+                <a:rPr lang="en-US" altLang="ko-KR" dirty="0">
+                  <a:solidFill>
+                    <a:srgbClr val="222222"/>
+                  </a:solidFill>
+                  <a:latin typeface="Arial Narrow" panose="020B0606020202030204" pitchFamily="34" charset="0"/>
+                </a:rPr>
+                <a:t>Instance, object, entity</a:t>
+              </a:r>
+              <a:endParaRPr lang="ko-KR" altLang="en-US" dirty="0"/>
+            </a:p>
+          </p:txBody>
+        </p:sp>
+      </p:grpSp>
     </p:spTree>
     <p:extLst>
       <p:ext uri="{BB962C8B-B14F-4D97-AF65-F5344CB8AC3E}">
